--- a/docs/private-beta/hosted-ux-qa/supreme-compliance/Supreme-Compliance-Board.pptx
+++ b/docs/private-beta/hosted-ux-qa/supreme-compliance/Supreme-Compliance-Board.pptx
@@ -8,6 +8,8 @@
     <p:sldId id="259" r:id="rId4"/>
     <p:sldId id="260" r:id="rId5"/>
     <p:sldId id="261" r:id="rId6"/>
+    <p:sldId id="262" r:id="rId7"/>
+    <p:sldId id="263" r:id="rId8"/>
   </p:sldIdLst>
   <p:sldSz cx="9144000" cy="6858000" type="screen4x3"/>
   <p:notesSz cx="6858000" cy="9144000"/>
@@ -33,13 +35,213 @@
       </p:grpSpPr>
       <p:sp>
         <p:nvSpPr>
+          <p:cNvPr id="20" name="k0"/>
+          <p:cNvSpPr txBox="1"/>
+          <p:nvPr/>
+        </p:nvSpPr>
+        <p:spPr>
+          <a:xfrm>
+            <a:off x="457200" y="1600000"/>
+            <a:ext cx="1950000" cy="1100000"/>
+          </a:xfrm>
+          <a:prstGeom prst="roundRect">
+            <a:avLst/>
+          </a:prstGeom>
+          <a:solidFill>
+            <a:srgbClr val="F8FAFC"/>
+          </a:solidFill>
+          <a:ln w="12700">
+            <a:solidFill>
+              <a:srgbClr val="CBD5E1"/>
+            </a:solidFill>
+          </a:ln>
+        </p:spPr>
+        <p:txBody>
+          <a:bodyPr anchor="ctr"/>
+          <a:lstStyle/>
+          <a:p>
+            <a:pPr algn="ctr"/>
+            <a:r>
+              <a:rPr lang="en-US" sz="2000" b="1" dirty="0">
+                <a:solidFill>
+                  <a:srgbClr val="0F172A"/>
+                </a:solidFill>
+              </a:rPr>
+              <a:t>2</a:t>
+            </a:r>
+          </a:p>
+          <a:p>
+            <a:pPr algn="ctr"/>
+            <a:r>
+              <a:rPr lang="en-US" sz="1100" dirty="0">
+                <a:solidFill>
+                  <a:srgbClr val="475569"/>
+                </a:solidFill>
+              </a:rPr>
+              <a:t>Active programs</a:t>
+            </a:r>
+          </a:p>
+        </p:txBody>
+      </p:sp>
+      <p:sp>
+        <p:nvSpPr>
+          <p:cNvPr id="21" name="k1"/>
+          <p:cNvSpPr txBox="1"/>
+          <p:nvPr/>
+        </p:nvSpPr>
+        <p:spPr>
+          <a:xfrm>
+            <a:off x="2557200" y="1600000"/>
+            <a:ext cx="1950000" cy="1100000"/>
+          </a:xfrm>
+          <a:prstGeom prst="roundRect">
+            <a:avLst/>
+          </a:prstGeom>
+          <a:solidFill>
+            <a:srgbClr val="F8FAFC"/>
+          </a:solidFill>
+          <a:ln w="12700">
+            <a:solidFill>
+              <a:srgbClr val="CBD5E1"/>
+            </a:solidFill>
+          </a:ln>
+        </p:spPr>
+        <p:txBody>
+          <a:bodyPr anchor="ctr"/>
+          <a:lstStyle/>
+          <a:p>
+            <a:pPr algn="ctr"/>
+            <a:r>
+              <a:rPr lang="en-US" sz="2000" b="1" dirty="0">
+                <a:solidFill>
+                  <a:srgbClr val="0F172A"/>
+                </a:solidFill>
+              </a:rPr>
+              <a:t>4</a:t>
+            </a:r>
+          </a:p>
+          <a:p>
+            <a:pPr algn="ctr"/>
+            <a:r>
+              <a:rPr lang="en-US" sz="1100" dirty="0">
+                <a:solidFill>
+                  <a:srgbClr val="475569"/>
+                </a:solidFill>
+              </a:rPr>
+              <a:t>Open gaps</a:t>
+            </a:r>
+          </a:p>
+        </p:txBody>
+      </p:sp>
+      <p:sp>
+        <p:nvSpPr>
+          <p:cNvPr id="22" name="k2"/>
+          <p:cNvSpPr txBox="1"/>
+          <p:nvPr/>
+        </p:nvSpPr>
+        <p:spPr>
+          <a:xfrm>
+            <a:off x="4657200" y="1600000"/>
+            <a:ext cx="1950000" cy="1100000"/>
+          </a:xfrm>
+          <a:prstGeom prst="roundRect">
+            <a:avLst/>
+          </a:prstGeom>
+          <a:solidFill>
+            <a:srgbClr val="F8FAFC"/>
+          </a:solidFill>
+          <a:ln w="12700">
+            <a:solidFill>
+              <a:srgbClr val="CBD5E1"/>
+            </a:solidFill>
+          </a:ln>
+        </p:spPr>
+        <p:txBody>
+          <a:bodyPr anchor="ctr"/>
+          <a:lstStyle/>
+          <a:p>
+            <a:pPr algn="ctr"/>
+            <a:r>
+              <a:rPr lang="en-US" sz="2000" b="1" dirty="0">
+                <a:solidFill>
+                  <a:srgbClr val="0F172A"/>
+                </a:solidFill>
+              </a:rPr>
+              <a:t>1</a:t>
+            </a:r>
+          </a:p>
+          <a:p>
+            <a:pPr algn="ctr"/>
+            <a:r>
+              <a:rPr lang="en-US" sz="1100" dirty="0">
+                <a:solidFill>
+                  <a:srgbClr val="475569"/>
+                </a:solidFill>
+              </a:rPr>
+              <a:t>Overdue attestations</a:t>
+            </a:r>
+          </a:p>
+        </p:txBody>
+      </p:sp>
+      <p:sp>
+        <p:nvSpPr>
+          <p:cNvPr id="23" name="k3"/>
+          <p:cNvSpPr txBox="1"/>
+          <p:nvPr/>
+        </p:nvSpPr>
+        <p:spPr>
+          <a:xfrm>
+            <a:off x="6757200" y="1600000"/>
+            <a:ext cx="1950000" cy="1100000"/>
+          </a:xfrm>
+          <a:prstGeom prst="roundRect">
+            <a:avLst/>
+          </a:prstGeom>
+          <a:solidFill>
+            <a:srgbClr val="F8FAFC"/>
+          </a:solidFill>
+          <a:ln w="12700">
+            <a:solidFill>
+              <a:srgbClr val="CBD5E1"/>
+            </a:solidFill>
+          </a:ln>
+        </p:spPr>
+        <p:txBody>
+          <a:bodyPr anchor="ctr"/>
+          <a:lstStyle/>
+          <a:p>
+            <a:pPr algn="ctr"/>
+            <a:r>
+              <a:rPr lang="en-US" sz="2000" b="1" dirty="0">
+                <a:solidFill>
+                  <a:srgbClr val="0F172A"/>
+                </a:solidFill>
+              </a:rPr>
+              <a:t>0</a:t>
+            </a:r>
+          </a:p>
+          <a:p>
+            <a:pPr algn="ctr"/>
+            <a:r>
+              <a:rPr lang="en-US" sz="1100" dirty="0">
+                <a:solidFill>
+                  <a:srgbClr val="475569"/>
+                </a:solidFill>
+              </a:rPr>
+              <a:t>Expired exceptions</a:t>
+            </a:r>
+          </a:p>
+        </p:txBody>
+      </p:sp>
+      <p:sp>
+        <p:nvSpPr>
           <p:cNvPr id="2" name="t0"/>
           <p:cNvSpPr txBox="1"/>
           <p:nvPr/>
         </p:nvSpPr>
         <p:spPr>
           <a:xfrm>
-            <a:off x="457200" y="800000"/>
+            <a:off x="457200" y="2900000"/>
             <a:ext cx="8229600" cy="457200"/>
           </a:xfrm>
           <a:prstGeom prst="rect">
@@ -69,7 +271,7 @@
         </p:nvSpPr>
         <p:spPr>
           <a:xfrm>
-            <a:off x="457200" y="1280000"/>
+            <a:off x="457200" y="3320000"/>
             <a:ext cx="8229600" cy="457200"/>
           </a:xfrm>
           <a:prstGeom prst="rect">
@@ -99,7 +301,7 @@
         </p:nvSpPr>
         <p:spPr>
           <a:xfrm>
-            <a:off x="457200" y="1760000"/>
+            <a:off x="457200" y="3740000"/>
             <a:ext cx="8229600" cy="457200"/>
           </a:xfrm>
           <a:prstGeom prst="rect">
@@ -129,24 +331,54 @@
         </p:nvSpPr>
         <p:spPr>
           <a:xfrm>
-            <a:off x="457200" y="2240000"/>
-            <a:ext cx="8229600" cy="457200"/>
-          </a:xfrm>
-          <a:prstGeom prst="rect">
-            <a:avLst/>
-          </a:prstGeom>
-        </p:spPr>
-        <p:txBody>
-          <a:bodyPr/>
-          <a:lstStyle/>
-          <a:p>
-            <a:r>
-              <a:rPr lang="en-US" sz="1600" b="0" dirty="0">
-                <a:solidFill>
-                  <a:srgbClr val="1E293B"/>
-                </a:solidFill>
-              </a:rPr>
-              <a:t>• Readiness and coverage are not certification, attestation, or a claim that this organization is compliant. Not applicable is not pass. Evidence presence is not pass. An attestati</a:t>
+            <a:off x="457200" y="4160000"/>
+            <a:ext cx="8229600" cy="457200"/>
+          </a:xfrm>
+          <a:prstGeom prst="rect">
+            <a:avLst/>
+          </a:prstGeom>
+        </p:spPr>
+        <p:txBody>
+          <a:bodyPr/>
+          <a:lstStyle/>
+          <a:p>
+            <a:r>
+              <a:rPr lang="en-US" sz="1600" b="0" dirty="0">
+                <a:solidFill>
+                  <a:srgbClr val="1E293B"/>
+                </a:solidFill>
+              </a:rPr>
+              <a:t>• Live tenant records only.</a:t>
+            </a:r>
+          </a:p>
+        </p:txBody>
+      </p:sp>
+      <p:sp>
+        <p:nvSpPr>
+          <p:cNvPr id="6" name="t4"/>
+          <p:cNvSpPr txBox="1"/>
+          <p:nvPr/>
+        </p:nvSpPr>
+        <p:spPr>
+          <a:xfrm>
+            <a:off x="457200" y="4580000"/>
+            <a:ext cx="8229600" cy="457200"/>
+          </a:xfrm>
+          <a:prstGeom prst="rect">
+            <a:avLst/>
+          </a:prstGeom>
+        </p:spPr>
+        <p:txBody>
+          <a:bodyPr/>
+          <a:lstStyle/>
+          <a:p>
+            <a:r>
+              <a:rPr lang="en-US" sz="1600" b="0" dirty="0">
+                <a:solidFill>
+                  <a:srgbClr val="1E293B"/>
+                </a:solidFill>
+              </a:rPr>
+              <a:t>Readiness and coverage are not certification, attestation, or a claim that this organization is compliant. Not applicable is not pass. Evidence presence is not pass. An attestation</a:t>
             </a:r>
           </a:p>
         </p:txBody>
@@ -178,13 +410,213 @@
       </p:grpSpPr>
       <p:sp>
         <p:nvSpPr>
+          <p:cNvPr id="20" name="k0"/>
+          <p:cNvSpPr txBox="1"/>
+          <p:nvPr/>
+        </p:nvSpPr>
+        <p:spPr>
+          <a:xfrm>
+            <a:off x="457200" y="1600000"/>
+            <a:ext cx="1950000" cy="1100000"/>
+          </a:xfrm>
+          <a:prstGeom prst="roundRect">
+            <a:avLst/>
+          </a:prstGeom>
+          <a:solidFill>
+            <a:srgbClr val="F8FAFC"/>
+          </a:solidFill>
+          <a:ln w="12700">
+            <a:solidFill>
+              <a:srgbClr val="CBD5E1"/>
+            </a:solidFill>
+          </a:ln>
+        </p:spPr>
+        <p:txBody>
+          <a:bodyPr anchor="ctr"/>
+          <a:lstStyle/>
+          <a:p>
+            <a:pPr algn="ctr"/>
+            <a:r>
+              <a:rPr lang="en-US" sz="2000" b="1" dirty="0">
+                <a:solidFill>
+                  <a:srgbClr val="0F172A"/>
+                </a:solidFill>
+              </a:rPr>
+              <a:t>Not calculated</a:t>
+            </a:r>
+          </a:p>
+          <a:p>
+            <a:pPr algn="ctr"/>
+            <a:r>
+              <a:rPr lang="en-US" sz="1100" dirty="0">
+                <a:solidFill>
+                  <a:srgbClr val="475569"/>
+                </a:solidFill>
+              </a:rPr>
+              <a:t>Mapped</a:t>
+            </a:r>
+          </a:p>
+        </p:txBody>
+      </p:sp>
+      <p:sp>
+        <p:nvSpPr>
+          <p:cNvPr id="21" name="k1"/>
+          <p:cNvSpPr txBox="1"/>
+          <p:nvPr/>
+        </p:nvSpPr>
+        <p:spPr>
+          <a:xfrm>
+            <a:off x="2557200" y="1600000"/>
+            <a:ext cx="1950000" cy="1100000"/>
+          </a:xfrm>
+          <a:prstGeom prst="roundRect">
+            <a:avLst/>
+          </a:prstGeom>
+          <a:solidFill>
+            <a:srgbClr val="F8FAFC"/>
+          </a:solidFill>
+          <a:ln w="12700">
+            <a:solidFill>
+              <a:srgbClr val="CBD5E1"/>
+            </a:solidFill>
+          </a:ln>
+        </p:spPr>
+        <p:txBody>
+          <a:bodyPr anchor="ctr"/>
+          <a:lstStyle/>
+          <a:p>
+            <a:pPr algn="ctr"/>
+            <a:r>
+              <a:rPr lang="en-US" sz="2000" b="1" dirty="0">
+                <a:solidFill>
+                  <a:srgbClr val="0F172A"/>
+                </a:solidFill>
+              </a:rPr>
+              <a:t>Not calculated</a:t>
+            </a:r>
+          </a:p>
+          <a:p>
+            <a:pPr algn="ctr"/>
+            <a:r>
+              <a:rPr lang="en-US" sz="1100" dirty="0">
+                <a:solidFill>
+                  <a:srgbClr val="475569"/>
+                </a:solidFill>
+              </a:rPr>
+              <a:t>Implemented</a:t>
+            </a:r>
+          </a:p>
+        </p:txBody>
+      </p:sp>
+      <p:sp>
+        <p:nvSpPr>
+          <p:cNvPr id="22" name="k2"/>
+          <p:cNvSpPr txBox="1"/>
+          <p:nvPr/>
+        </p:nvSpPr>
+        <p:spPr>
+          <a:xfrm>
+            <a:off x="4657200" y="1600000"/>
+            <a:ext cx="1950000" cy="1100000"/>
+          </a:xfrm>
+          <a:prstGeom prst="roundRect">
+            <a:avLst/>
+          </a:prstGeom>
+          <a:solidFill>
+            <a:srgbClr val="F8FAFC"/>
+          </a:solidFill>
+          <a:ln w="12700">
+            <a:solidFill>
+              <a:srgbClr val="CBD5E1"/>
+            </a:solidFill>
+          </a:ln>
+        </p:spPr>
+        <p:txBody>
+          <a:bodyPr anchor="ctr"/>
+          <a:lstStyle/>
+          <a:p>
+            <a:pPr algn="ctr"/>
+            <a:r>
+              <a:rPr lang="en-US" sz="2000" b="1" dirty="0">
+                <a:solidFill>
+                  <a:srgbClr val="0F172A"/>
+                </a:solidFill>
+              </a:rPr>
+              <a:t>No implemented map</a:t>
+            </a:r>
+          </a:p>
+          <a:p>
+            <a:pPr algn="ctr"/>
+            <a:r>
+              <a:rPr lang="en-US" sz="1100" dirty="0">
+                <a:solidFill>
+                  <a:srgbClr val="475569"/>
+                </a:solidFill>
+              </a:rPr>
+              <a:t>Tested</a:t>
+            </a:r>
+          </a:p>
+        </p:txBody>
+      </p:sp>
+      <p:sp>
+        <p:nvSpPr>
+          <p:cNvPr id="23" name="k3"/>
+          <p:cNvSpPr txBox="1"/>
+          <p:nvPr/>
+        </p:nvSpPr>
+        <p:spPr>
+          <a:xfrm>
+            <a:off x="6757200" y="1600000"/>
+            <a:ext cx="1950000" cy="1100000"/>
+          </a:xfrm>
+          <a:prstGeom prst="roundRect">
+            <a:avLst/>
+          </a:prstGeom>
+          <a:solidFill>
+            <a:srgbClr val="F8FAFC"/>
+          </a:solidFill>
+          <a:ln w="12700">
+            <a:solidFill>
+              <a:srgbClr val="CBD5E1"/>
+            </a:solidFill>
+          </a:ln>
+        </p:spPr>
+        <p:txBody>
+          <a:bodyPr anchor="ctr"/>
+          <a:lstStyle/>
+          <a:p>
+            <a:pPr algn="ctr"/>
+            <a:r>
+              <a:rPr lang="en-US" sz="2000" b="1" dirty="0">
+                <a:solidFill>
+                  <a:srgbClr val="0F172A"/>
+                </a:solidFill>
+              </a:rPr>
+              <a:t>Not calculated</a:t>
+            </a:r>
+          </a:p>
+          <a:p>
+            <a:pPr algn="ctr"/>
+            <a:r>
+              <a:rPr lang="en-US" sz="1100" dirty="0">
+                <a:solidFill>
+                  <a:srgbClr val="475569"/>
+                </a:solidFill>
+              </a:rPr>
+              <a:t>Evidence</a:t>
+            </a:r>
+          </a:p>
+        </p:txBody>
+      </p:sp>
+      <p:sp>
+        <p:nvSpPr>
           <p:cNvPr id="2" name="t0"/>
           <p:cNvSpPr txBox="1"/>
           <p:nvPr/>
         </p:nvSpPr>
         <p:spPr>
           <a:xfrm>
-            <a:off x="457200" y="800000"/>
+            <a:off x="457200" y="2900000"/>
             <a:ext cx="8229600" cy="457200"/>
           </a:xfrm>
           <a:prstGeom prst="rect">
@@ -201,7 +633,7 @@
                   <a:srgbClr val="0F172A"/>
                 </a:solidFill>
               </a:rPr>
-              <a:t>Enterprise compliance posture</a:t>
+              <a:t>Coverage</a:t>
             </a:r>
           </a:p>
         </p:txBody>
@@ -214,24 +646,24 @@
         </p:nvSpPr>
         <p:spPr>
           <a:xfrm>
-            <a:off x="457200" y="1280000"/>
-            <a:ext cx="8229600" cy="457200"/>
-          </a:xfrm>
-          <a:prstGeom prst="rect">
-            <a:avLst/>
-          </a:prstGeom>
-        </p:spPr>
-        <p:txBody>
-          <a:bodyPr/>
-          <a:lstStyle/>
-          <a:p>
-            <a:r>
-              <a:rPr lang="en-US" sz="1600" b="0" dirty="0">
-                <a:solidFill>
-                  <a:srgbClr val="1E293B"/>
-                </a:solidFill>
-              </a:rPr>
-              <a:t>• 2 active framework programs</a:t>
+            <a:off x="457200" y="3320000"/>
+            <a:ext cx="8229600" cy="457200"/>
+          </a:xfrm>
+          <a:prstGeom prst="rect">
+            <a:avLst/>
+          </a:prstGeom>
+        </p:spPr>
+        <p:txBody>
+          <a:bodyPr/>
+          <a:lstStyle/>
+          <a:p>
+            <a:r>
+              <a:rPr lang="en-US" sz="1600" b="0" dirty="0">
+                <a:solidFill>
+                  <a:srgbClr val="1E293B"/>
+                </a:solidFill>
+              </a:rPr>
+              <a:t>• ISO/IEC 27001 2022-ref: mapped Not calculated</a:t>
             </a:r>
           </a:p>
         </p:txBody>
@@ -244,84 +676,24 @@
         </p:nvSpPr>
         <p:spPr>
           <a:xfrm>
-            <a:off x="457200" y="1760000"/>
-            <a:ext cx="8229600" cy="457200"/>
-          </a:xfrm>
-          <a:prstGeom prst="rect">
-            <a:avLst/>
-          </a:prstGeom>
-        </p:spPr>
-        <p:txBody>
-          <a:bodyPr/>
-          <a:lstStyle/>
-          <a:p>
-            <a:r>
-              <a:rPr lang="en-US" sz="1600" b="0" dirty="0">
-                <a:solidFill>
-                  <a:srgbClr val="1E293B"/>
-                </a:solidFill>
-              </a:rPr>
-              <a:t>• 4 open gaps</a:t>
-            </a:r>
-          </a:p>
-        </p:txBody>
-      </p:sp>
-      <p:sp>
-        <p:nvSpPr>
-          <p:cNvPr id="5" name="t3"/>
-          <p:cNvSpPr txBox="1"/>
-          <p:nvPr/>
-        </p:nvSpPr>
-        <p:spPr>
-          <a:xfrm>
-            <a:off x="457200" y="2240000"/>
-            <a:ext cx="8229600" cy="457200"/>
-          </a:xfrm>
-          <a:prstGeom prst="rect">
-            <a:avLst/>
-          </a:prstGeom>
-        </p:spPr>
-        <p:txBody>
-          <a:bodyPr/>
-          <a:lstStyle/>
-          <a:p>
-            <a:r>
-              <a:rPr lang="en-US" sz="1600" b="0" dirty="0">
-                <a:solidFill>
-                  <a:srgbClr val="1E293B"/>
-                </a:solidFill>
-              </a:rPr>
-              <a:t>• 0 overdue attestation campaigns</a:t>
-            </a:r>
-          </a:p>
-        </p:txBody>
-      </p:sp>
-      <p:sp>
-        <p:nvSpPr>
-          <p:cNvPr id="6" name="t4"/>
-          <p:cNvSpPr txBox="1"/>
-          <p:nvPr/>
-        </p:nvSpPr>
-        <p:spPr>
-          <a:xfrm>
-            <a:off x="457200" y="2720000"/>
-            <a:ext cx="8229600" cy="457200"/>
-          </a:xfrm>
-          <a:prstGeom prst="rect">
-            <a:avLst/>
-          </a:prstGeom>
-        </p:spPr>
-        <p:txBody>
-          <a:bodyPr/>
-          <a:lstStyle/>
-          <a:p>
-            <a:r>
-              <a:rPr lang="en-US" sz="1600" b="0" dirty="0">
-                <a:solidFill>
-                  <a:srgbClr val="1E293B"/>
-                </a:solidFill>
-              </a:rPr>
-              <a:t>• 0 expired exceptions</a:t>
+            <a:off x="457200" y="3740000"/>
+            <a:ext cx="8229600" cy="457200"/>
+          </a:xfrm>
+          <a:prstGeom prst="rect">
+            <a:avLst/>
+          </a:prstGeom>
+        </p:spPr>
+        <p:txBody>
+          <a:bodyPr/>
+          <a:lstStyle/>
+          <a:p>
+            <a:r>
+              <a:rPr lang="en-US" sz="1600" b="0" dirty="0">
+                <a:solidFill>
+                  <a:srgbClr val="1E293B"/>
+                </a:solidFill>
+              </a:rPr>
+              <a:t>• NYDFS cybersecurity requirements 500-ref: mapped 100%</a:t>
             </a:r>
           </a:p>
         </p:txBody>
@@ -353,13 +725,213 @@
       </p:grpSpPr>
       <p:sp>
         <p:nvSpPr>
+          <p:cNvPr id="20" name="k0"/>
+          <p:cNvSpPr txBox="1"/>
+          <p:nvPr/>
+        </p:nvSpPr>
+        <p:spPr>
+          <a:xfrm>
+            <a:off x="457200" y="1600000"/>
+            <a:ext cx="1950000" cy="1100000"/>
+          </a:xfrm>
+          <a:prstGeom prst="roundRect">
+            <a:avLst/>
+          </a:prstGeom>
+          <a:solidFill>
+            <a:srgbClr val="F8FAFC"/>
+          </a:solidFill>
+          <a:ln w="12700">
+            <a:solidFill>
+              <a:srgbClr val="CBD5E1"/>
+            </a:solidFill>
+          </a:ln>
+        </p:spPr>
+        <p:txBody>
+          <a:bodyPr anchor="ctr"/>
+          <a:lstStyle/>
+          <a:p>
+            <a:pPr algn="ctr"/>
+            <a:r>
+              <a:rPr lang="en-US" sz="2000" b="1" dirty="0">
+                <a:solidFill>
+                  <a:srgbClr val="0F172A"/>
+                </a:solidFill>
+              </a:rPr>
+              <a:t>Not calculated</a:t>
+            </a:r>
+          </a:p>
+          <a:p>
+            <a:pPr algn="ctr"/>
+            <a:r>
+              <a:rPr lang="en-US" sz="1100" dirty="0">
+                <a:solidFill>
+                  <a:srgbClr val="475569"/>
+                </a:solidFill>
+              </a:rPr>
+              <a:t>Evidence coverage</a:t>
+            </a:r>
+          </a:p>
+        </p:txBody>
+      </p:sp>
+      <p:sp>
+        <p:nvSpPr>
+          <p:cNvPr id="21" name="k1"/>
+          <p:cNvSpPr txBox="1"/>
+          <p:nvPr/>
+        </p:nvSpPr>
+        <p:spPr>
+          <a:xfrm>
+            <a:off x="2557200" y="1600000"/>
+            <a:ext cx="1950000" cy="1100000"/>
+          </a:xfrm>
+          <a:prstGeom prst="roundRect">
+            <a:avLst/>
+          </a:prstGeom>
+          <a:solidFill>
+            <a:srgbClr val="F8FAFC"/>
+          </a:solidFill>
+          <a:ln w="12700">
+            <a:solidFill>
+              <a:srgbClr val="CBD5E1"/>
+            </a:solidFill>
+          </a:ln>
+        </p:spPr>
+        <p:txBody>
+          <a:bodyPr anchor="ctr"/>
+          <a:lstStyle/>
+          <a:p>
+            <a:pPr algn="ctr"/>
+            <a:r>
+              <a:rPr lang="en-US" sz="2000" b="1" dirty="0">
+                <a:solidFill>
+                  <a:srgbClr val="0F172A"/>
+                </a:solidFill>
+              </a:rPr>
+              <a:t>4</a:t>
+            </a:r>
+          </a:p>
+          <a:p>
+            <a:pPr algn="ctr"/>
+            <a:r>
+              <a:rPr lang="en-US" sz="1100" dirty="0">
+                <a:solidFill>
+                  <a:srgbClr val="475569"/>
+                </a:solidFill>
+              </a:rPr>
+              <a:t>Open gaps</a:t>
+            </a:r>
+          </a:p>
+        </p:txBody>
+      </p:sp>
+      <p:sp>
+        <p:nvSpPr>
+          <p:cNvPr id="22" name="k2"/>
+          <p:cNvSpPr txBox="1"/>
+          <p:nvPr/>
+        </p:nvSpPr>
+        <p:spPr>
+          <a:xfrm>
+            <a:off x="4657200" y="1600000"/>
+            <a:ext cx="1950000" cy="1100000"/>
+          </a:xfrm>
+          <a:prstGeom prst="roundRect">
+            <a:avLst/>
+          </a:prstGeom>
+          <a:solidFill>
+            <a:srgbClr val="F8FAFC"/>
+          </a:solidFill>
+          <a:ln w="12700">
+            <a:solidFill>
+              <a:srgbClr val="CBD5E1"/>
+            </a:solidFill>
+          </a:ln>
+        </p:spPr>
+        <p:txBody>
+          <a:bodyPr anchor="ctr"/>
+          <a:lstStyle/>
+          <a:p>
+            <a:pPr algn="ctr"/>
+            <a:r>
+              <a:rPr lang="en-US" sz="2000" b="1" dirty="0">
+                <a:solidFill>
+                  <a:srgbClr val="0F172A"/>
+                </a:solidFill>
+              </a:rPr>
+              <a:t>0</a:t>
+            </a:r>
+          </a:p>
+          <a:p>
+            <a:pPr algn="ctr"/>
+            <a:r>
+              <a:rPr lang="en-US" sz="1100" dirty="0">
+                <a:solidFill>
+                  <a:srgbClr val="475569"/>
+                </a:solidFill>
+              </a:rPr>
+              <a:t>Expired exceptions</a:t>
+            </a:r>
+          </a:p>
+        </p:txBody>
+      </p:sp>
+      <p:sp>
+        <p:nvSpPr>
+          <p:cNvPr id="23" name="k3"/>
+          <p:cNvSpPr txBox="1"/>
+          <p:nvPr/>
+        </p:nvSpPr>
+        <p:spPr>
+          <a:xfrm>
+            <a:off x="6757200" y="1600000"/>
+            <a:ext cx="1950000" cy="1100000"/>
+          </a:xfrm>
+          <a:prstGeom prst="roundRect">
+            <a:avLst/>
+          </a:prstGeom>
+          <a:solidFill>
+            <a:srgbClr val="F8FAFC"/>
+          </a:solidFill>
+          <a:ln w="12700">
+            <a:solidFill>
+              <a:srgbClr val="CBD5E1"/>
+            </a:solidFill>
+          </a:ln>
+        </p:spPr>
+        <p:txBody>
+          <a:bodyPr anchor="ctr"/>
+          <a:lstStyle/>
+          <a:p>
+            <a:pPr algn="ctr"/>
+            <a:r>
+              <a:rPr lang="en-US" sz="2000" b="1" dirty="0">
+                <a:solidFill>
+                  <a:srgbClr val="0F172A"/>
+                </a:solidFill>
+              </a:rPr>
+              <a:t>2</a:t>
+            </a:r>
+          </a:p>
+          <a:p>
+            <a:pPr algn="ctr"/>
+            <a:r>
+              <a:rPr lang="en-US" sz="1100" dirty="0">
+                <a:solidFill>
+                  <a:srgbClr val="475569"/>
+                </a:solidFill>
+              </a:rPr>
+              <a:t>Active programs</a:t>
+            </a:r>
+          </a:p>
+        </p:txBody>
+      </p:sp>
+      <p:sp>
+        <p:nvSpPr>
           <p:cNvPr id="2" name="t0"/>
           <p:cNvSpPr txBox="1"/>
           <p:nvPr/>
         </p:nvSpPr>
         <p:spPr>
           <a:xfrm>
-            <a:off x="457200" y="800000"/>
+            <a:off x="457200" y="2900000"/>
             <a:ext cx="8229600" cy="457200"/>
           </a:xfrm>
           <a:prstGeom prst="rect">
@@ -376,7 +948,7 @@
                   <a:srgbClr val="0F172A"/>
                 </a:solidFill>
               </a:rPr>
-              <a:t>Framework readiness</a:t>
+              <a:t>Evidence health</a:t>
             </a:r>
           </a:p>
         </p:txBody>
@@ -389,24 +961,24 @@
         </p:nvSpPr>
         <p:spPr>
           <a:xfrm>
-            <a:off x="457200" y="1280000"/>
-            <a:ext cx="8229600" cy="457200"/>
-          </a:xfrm>
-          <a:prstGeom prst="rect">
-            <a:avLst/>
-          </a:prstGeom>
-        </p:spPr>
-        <p:txBody>
-          <a:bodyPr/>
-          <a:lstStyle/>
-          <a:p>
-            <a:r>
-              <a:rPr lang="en-US" sz="1600" b="0" dirty="0">
-                <a:solidFill>
-                  <a:srgbClr val="1E293B"/>
-                </a:solidFill>
-              </a:rPr>
-              <a:t>• ISO/IEC 27001 2022-ref: 100% requirement coverage</a:t>
+            <a:off x="457200" y="3320000"/>
+            <a:ext cx="8229600" cy="457200"/>
+          </a:xfrm>
+          <a:prstGeom prst="rect">
+            <a:avLst/>
+          </a:prstGeom>
+        </p:spPr>
+        <p:txBody>
+          <a:bodyPr/>
+          <a:lstStyle/>
+          <a:p>
+            <a:r>
+              <a:rPr lang="en-US" sz="1600" b="0" dirty="0">
+                <a:solidFill>
+                  <a:srgbClr val="1E293B"/>
+                </a:solidFill>
+              </a:rPr>
+              <a:t>• CLEAN current supporting links only count toward evidence coverage.</a:t>
             </a:r>
           </a:p>
         </p:txBody>
@@ -419,24 +991,54 @@
         </p:nvSpPr>
         <p:spPr>
           <a:xfrm>
-            <a:off x="457200" y="1760000"/>
-            <a:ext cx="8229600" cy="457200"/>
-          </a:xfrm>
-          <a:prstGeom prst="rect">
-            <a:avLst/>
-          </a:prstGeom>
-        </p:spPr>
-        <p:txBody>
-          <a:bodyPr/>
-          <a:lstStyle/>
-          <a:p>
-            <a:r>
-              <a:rPr lang="en-US" sz="1600" b="0" dirty="0">
-                <a:solidFill>
-                  <a:srgbClr val="1E293B"/>
-                </a:solidFill>
-              </a:rPr>
-              <a:t>• NYDFS cybersecurity requirements 500-ref: 100% requirement coverage</a:t>
+            <a:off x="457200" y="3740000"/>
+            <a:ext cx="8229600" cy="457200"/>
+          </a:xfrm>
+          <a:prstGeom prst="rect">
+            <a:avLst/>
+          </a:prstGeom>
+        </p:spPr>
+        <p:txBody>
+          <a:bodyPr/>
+          <a:lstStyle/>
+          <a:p>
+            <a:r>
+              <a:rPr lang="en-US" sz="1600" b="0" dirty="0">
+                <a:solidFill>
+                  <a:srgbClr val="1E293B"/>
+                </a:solidFill>
+              </a:rPr>
+              <a:t>• A file is not compliance.</a:t>
+            </a:r>
+          </a:p>
+        </p:txBody>
+      </p:sp>
+      <p:sp>
+        <p:nvSpPr>
+          <p:cNvPr id="5" name="t3"/>
+          <p:cNvSpPr txBox="1"/>
+          <p:nvPr/>
+        </p:nvSpPr>
+        <p:spPr>
+          <a:xfrm>
+            <a:off x="457200" y="4160000"/>
+            <a:ext cx="8229600" cy="457200"/>
+          </a:xfrm>
+          <a:prstGeom prst="rect">
+            <a:avLst/>
+          </a:prstGeom>
+        </p:spPr>
+        <p:txBody>
+          <a:bodyPr/>
+          <a:lstStyle/>
+          <a:p>
+            <a:r>
+              <a:rPr lang="en-US" sz="1600" b="0" dirty="0">
+                <a:solidFill>
+                  <a:srgbClr val="1E293B"/>
+                </a:solidFill>
+              </a:rPr>
+              <a:t>• Malware policy remains fail-closed.</a:t>
             </a:r>
           </a:p>
         </p:txBody>
@@ -468,13 +1070,213 @@
       </p:grpSpPr>
       <p:sp>
         <p:nvSpPr>
+          <p:cNvPr id="20" name="k0"/>
+          <p:cNvSpPr txBox="1"/>
+          <p:nvPr/>
+        </p:nvSpPr>
+        <p:spPr>
+          <a:xfrm>
+            <a:off x="457200" y="1600000"/>
+            <a:ext cx="1950000" cy="1100000"/>
+          </a:xfrm>
+          <a:prstGeom prst="roundRect">
+            <a:avLst/>
+          </a:prstGeom>
+          <a:solidFill>
+            <a:srgbClr val="F8FAFC"/>
+          </a:solidFill>
+          <a:ln w="12700">
+            <a:solidFill>
+              <a:srgbClr val="CBD5E1"/>
+            </a:solidFill>
+          </a:ln>
+        </p:spPr>
+        <p:txBody>
+          <a:bodyPr anchor="ctr"/>
+          <a:lstStyle/>
+          <a:p>
+            <a:pPr algn="ctr"/>
+            <a:r>
+              <a:rPr lang="en-US" sz="2000" b="1" dirty="0">
+                <a:solidFill>
+                  <a:srgbClr val="0F172A"/>
+                </a:solidFill>
+              </a:rPr>
+              <a:t>No implemented map</a:t>
+            </a:r>
+          </a:p>
+          <a:p>
+            <a:pPr algn="ctr"/>
+            <a:r>
+              <a:rPr lang="en-US" sz="1100" dirty="0">
+                <a:solidFill>
+                  <a:srgbClr val="475569"/>
+                </a:solidFill>
+              </a:rPr>
+              <a:t>Testing coverage</a:t>
+            </a:r>
+          </a:p>
+        </p:txBody>
+      </p:sp>
+      <p:sp>
+        <p:nvSpPr>
+          <p:cNvPr id="21" name="k1"/>
+          <p:cNvSpPr txBox="1"/>
+          <p:nvPr/>
+        </p:nvSpPr>
+        <p:spPr>
+          <a:xfrm>
+            <a:off x="2557200" y="1600000"/>
+            <a:ext cx="1950000" cy="1100000"/>
+          </a:xfrm>
+          <a:prstGeom prst="roundRect">
+            <a:avLst/>
+          </a:prstGeom>
+          <a:solidFill>
+            <a:srgbClr val="F8FAFC"/>
+          </a:solidFill>
+          <a:ln w="12700">
+            <a:solidFill>
+              <a:srgbClr val="CBD5E1"/>
+            </a:solidFill>
+          </a:ln>
+        </p:spPr>
+        <p:txBody>
+          <a:bodyPr anchor="ctr"/>
+          <a:lstStyle/>
+          <a:p>
+            <a:pPr algn="ctr"/>
+            <a:r>
+              <a:rPr lang="en-US" sz="2000" b="1" dirty="0">
+                <a:solidFill>
+                  <a:srgbClr val="0F172A"/>
+                </a:solidFill>
+              </a:rPr>
+              <a:t>Not calculated</a:t>
+            </a:r>
+          </a:p>
+          <a:p>
+            <a:pPr algn="ctr"/>
+            <a:r>
+              <a:rPr lang="en-US" sz="1100" dirty="0">
+                <a:solidFill>
+                  <a:srgbClr val="475569"/>
+                </a:solidFill>
+              </a:rPr>
+              <a:t>Implemented</a:t>
+            </a:r>
+          </a:p>
+        </p:txBody>
+      </p:sp>
+      <p:sp>
+        <p:nvSpPr>
+          <p:cNvPr id="22" name="k2"/>
+          <p:cNvSpPr txBox="1"/>
+          <p:nvPr/>
+        </p:nvSpPr>
+        <p:spPr>
+          <a:xfrm>
+            <a:off x="4657200" y="1600000"/>
+            <a:ext cx="1950000" cy="1100000"/>
+          </a:xfrm>
+          <a:prstGeom prst="roundRect">
+            <a:avLst/>
+          </a:prstGeom>
+          <a:solidFill>
+            <a:srgbClr val="F8FAFC"/>
+          </a:solidFill>
+          <a:ln w="12700">
+            <a:solidFill>
+              <a:srgbClr val="CBD5E1"/>
+            </a:solidFill>
+          </a:ln>
+        </p:spPr>
+        <p:txBody>
+          <a:bodyPr anchor="ctr"/>
+          <a:lstStyle/>
+          <a:p>
+            <a:pPr algn="ctr"/>
+            <a:r>
+              <a:rPr lang="en-US" sz="2000" b="1" dirty="0">
+                <a:solidFill>
+                  <a:srgbClr val="0F172A"/>
+                </a:solidFill>
+              </a:rPr>
+              <a:t>Not calculated</a:t>
+            </a:r>
+          </a:p>
+          <a:p>
+            <a:pPr algn="ctr"/>
+            <a:r>
+              <a:rPr lang="en-US" sz="1100" dirty="0">
+                <a:solidFill>
+                  <a:srgbClr val="475569"/>
+                </a:solidFill>
+              </a:rPr>
+              <a:t>Mapped</a:t>
+            </a:r>
+          </a:p>
+        </p:txBody>
+      </p:sp>
+      <p:sp>
+        <p:nvSpPr>
+          <p:cNvPr id="23" name="k3"/>
+          <p:cNvSpPr txBox="1"/>
+          <p:nvPr/>
+        </p:nvSpPr>
+        <p:spPr>
+          <a:xfrm>
+            <a:off x="6757200" y="1600000"/>
+            <a:ext cx="1950000" cy="1100000"/>
+          </a:xfrm>
+          <a:prstGeom prst="roundRect">
+            <a:avLst/>
+          </a:prstGeom>
+          <a:solidFill>
+            <a:srgbClr val="F8FAFC"/>
+          </a:solidFill>
+          <a:ln w="12700">
+            <a:solidFill>
+              <a:srgbClr val="CBD5E1"/>
+            </a:solidFill>
+          </a:ln>
+        </p:spPr>
+        <p:txBody>
+          <a:bodyPr anchor="ctr"/>
+          <a:lstStyle/>
+          <a:p>
+            <a:pPr algn="ctr"/>
+            <a:r>
+              <a:rPr lang="en-US" sz="2000" b="1" dirty="0">
+                <a:solidFill>
+                  <a:srgbClr val="0F172A"/>
+                </a:solidFill>
+              </a:rPr>
+              <a:t>1</a:t>
+            </a:r>
+          </a:p>
+          <a:p>
+            <a:pPr algn="ctr"/>
+            <a:r>
+              <a:rPr lang="en-US" sz="1100" dirty="0">
+                <a:solidFill>
+                  <a:srgbClr val="475569"/>
+                </a:solidFill>
+              </a:rPr>
+              <a:t>Overdue</a:t>
+            </a:r>
+          </a:p>
+        </p:txBody>
+      </p:sp>
+      <p:sp>
+        <p:nvSpPr>
           <p:cNvPr id="2" name="t0"/>
           <p:cNvSpPr txBox="1"/>
           <p:nvPr/>
         </p:nvSpPr>
         <p:spPr>
           <a:xfrm>
-            <a:off x="457200" y="800000"/>
+            <a:off x="457200" y="2900000"/>
             <a:ext cx="8229600" cy="457200"/>
           </a:xfrm>
           <a:prstGeom prst="rect">
@@ -491,7 +1293,7 @@
                   <a:srgbClr val="0F172A"/>
                 </a:solidFill>
               </a:rPr>
-              <a:t>Gaps</a:t>
+              <a:t>Testing status</a:t>
             </a:r>
           </a:p>
         </p:txBody>
@@ -504,24 +1306,24 @@
         </p:nvSpPr>
         <p:spPr>
           <a:xfrm>
-            <a:off x="457200" y="1280000"/>
-            <a:ext cx="8229600" cy="457200"/>
-          </a:xfrm>
-          <a:prstGeom prst="rect">
-            <a:avLst/>
-          </a:prstGeom>
-        </p:spPr>
-        <p:txBody>
-          <a:bodyPr/>
-          <a:lstStyle/>
-          <a:p>
-            <a:r>
-              <a:rPr lang="en-US" sz="1600" b="0" dirty="0">
-                <a:solidFill>
-                  <a:srgbClr val="1E293B"/>
-                </a:solidFill>
-              </a:rPr>
-              <a:t>• GAP-00004 A.15 has no current CLEAN evidence</a:t>
+            <a:off x="457200" y="3320000"/>
+            <a:ext cx="8229600" cy="457200"/>
+          </a:xfrm>
+          <a:prstGeom prst="rect">
+            <a:avLst/>
+          </a:prstGeom>
+        </p:spPr>
+        <p:txBody>
+          <a:bodyPr/>
+          <a:lstStyle/>
+          <a:p>
+            <a:r>
+              <a:rPr lang="en-US" sz="1600" b="0" dirty="0">
+                <a:solidFill>
+                  <a:srgbClr val="1E293B"/>
+                </a:solidFill>
+              </a:rPr>
+              <a:t>• Testing coverage No implemented mapped controls to test</a:t>
             </a:r>
           </a:p>
         </p:txBody>
@@ -534,84 +1336,24 @@
         </p:nvSpPr>
         <p:spPr>
           <a:xfrm>
-            <a:off x="457200" y="1760000"/>
-            <a:ext cx="8229600" cy="457200"/>
-          </a:xfrm>
-          <a:prstGeom prst="rect">
-            <a:avLst/>
-          </a:prstGeom>
-        </p:spPr>
-        <p:txBody>
-          <a:bodyPr/>
-          <a:lstStyle/>
-          <a:p>
-            <a:r>
-              <a:rPr lang="en-US" sz="1600" b="0" dirty="0">
-                <a:solidFill>
-                  <a:srgbClr val="1E293B"/>
-                </a:solidFill>
-              </a:rPr>
-              <a:t>• GAP-00003 A.15 is mapped to controls that are not implemented</a:t>
-            </a:r>
-          </a:p>
-        </p:txBody>
-      </p:sp>
-      <p:sp>
-        <p:nvSpPr>
-          <p:cNvPr id="5" name="t3"/>
-          <p:cNvSpPr txBox="1"/>
-          <p:nvPr/>
-        </p:nvSpPr>
-        <p:spPr>
-          <a:xfrm>
-            <a:off x="457200" y="2240000"/>
-            <a:ext cx="8229600" cy="457200"/>
-          </a:xfrm>
-          <a:prstGeom prst="rect">
-            <a:avLst/>
-          </a:prstGeom>
-        </p:spPr>
-        <p:txBody>
-          <a:bodyPr/>
-          <a:lstStyle/>
-          <a:p>
-            <a:r>
-              <a:rPr lang="en-US" sz="1600" b="0" dirty="0">
-                <a:solidFill>
-                  <a:srgbClr val="1E293B"/>
-                </a:solidFill>
-              </a:rPr>
-              <a:t>• GAP-00002 500.07 has no current CLEAN evidence</a:t>
-            </a:r>
-          </a:p>
-        </p:txBody>
-      </p:sp>
-      <p:sp>
-        <p:nvSpPr>
-          <p:cNvPr id="6" name="t4"/>
-          <p:cNvSpPr txBox="1"/>
-          <p:nvPr/>
-        </p:nvSpPr>
-        <p:spPr>
-          <a:xfrm>
-            <a:off x="457200" y="2720000"/>
-            <a:ext cx="8229600" cy="457200"/>
-          </a:xfrm>
-          <a:prstGeom prst="rect">
-            <a:avLst/>
-          </a:prstGeom>
-        </p:spPr>
-        <p:txBody>
-          <a:bodyPr/>
-          <a:lstStyle/>
-          <a:p>
-            <a:r>
-              <a:rPr lang="en-US" sz="1600" b="0" dirty="0">
-                <a:solidFill>
-                  <a:srgbClr val="1E293B"/>
-                </a:solidFill>
-              </a:rPr>
-              <a:t>• GAP-00001 500.07 is mapped to controls that are not implemented</a:t>
+            <a:off x="457200" y="3740000"/>
+            <a:ext cx="8229600" cy="457200"/>
+          </a:xfrm>
+          <a:prstGeom prst="rect">
+            <a:avLst/>
+          </a:prstGeom>
+        </p:spPr>
+        <p:txBody>
+          <a:bodyPr/>
+          <a:lstStyle/>
+          <a:p>
+            <a:r>
+              <a:rPr lang="en-US" sz="1600" b="0" dirty="0">
+                <a:solidFill>
+                  <a:srgbClr val="1E293B"/>
+                </a:solidFill>
+              </a:rPr>
+              <a:t>• No implemented mapped controls to test</a:t>
             </a:r>
           </a:p>
         </p:txBody>
@@ -643,13 +1385,113 @@
       </p:grpSpPr>
       <p:sp>
         <p:nvSpPr>
+          <p:cNvPr id="20" name="k0"/>
+          <p:cNvSpPr txBox="1"/>
+          <p:nvPr/>
+        </p:nvSpPr>
+        <p:spPr>
+          <a:xfrm>
+            <a:off x="457200" y="1600000"/>
+            <a:ext cx="1950000" cy="1100000"/>
+          </a:xfrm>
+          <a:prstGeom prst="roundRect">
+            <a:avLst/>
+          </a:prstGeom>
+          <a:solidFill>
+            <a:srgbClr val="F8FAFC"/>
+          </a:solidFill>
+          <a:ln w="12700">
+            <a:solidFill>
+              <a:srgbClr val="CBD5E1"/>
+            </a:solidFill>
+          </a:ln>
+        </p:spPr>
+        <p:txBody>
+          <a:bodyPr anchor="ctr"/>
+          <a:lstStyle/>
+          <a:p>
+            <a:pPr algn="ctr"/>
+            <a:r>
+              <a:rPr lang="en-US" sz="2000" b="1" dirty="0">
+                <a:solidFill>
+                  <a:srgbClr val="0F172A"/>
+                </a:solidFill>
+              </a:rPr>
+              <a:t>4</a:t>
+            </a:r>
+          </a:p>
+          <a:p>
+            <a:pPr algn="ctr"/>
+            <a:r>
+              <a:rPr lang="en-US" sz="1100" dirty="0">
+                <a:solidFill>
+                  <a:srgbClr val="475569"/>
+                </a:solidFill>
+              </a:rPr>
+              <a:t>Open gaps</a:t>
+            </a:r>
+          </a:p>
+        </p:txBody>
+      </p:sp>
+      <p:sp>
+        <p:nvSpPr>
+          <p:cNvPr id="21" name="k1"/>
+          <p:cNvSpPr txBox="1"/>
+          <p:nvPr/>
+        </p:nvSpPr>
+        <p:spPr>
+          <a:xfrm>
+            <a:off x="2557200" y="1600000"/>
+            <a:ext cx="1950000" cy="1100000"/>
+          </a:xfrm>
+          <a:prstGeom prst="roundRect">
+            <a:avLst/>
+          </a:prstGeom>
+          <a:solidFill>
+            <a:srgbClr val="F8FAFC"/>
+          </a:solidFill>
+          <a:ln w="12700">
+            <a:solidFill>
+              <a:srgbClr val="CBD5E1"/>
+            </a:solidFill>
+          </a:ln>
+        </p:spPr>
+        <p:txBody>
+          <a:bodyPr anchor="ctr"/>
+          <a:lstStyle/>
+          <a:p>
+            <a:pPr algn="ctr"/>
+            <a:r>
+              <a:rPr lang="en-US" sz="2000" b="1" dirty="0">
+                <a:solidFill>
+                  <a:srgbClr val="0F172A"/>
+                </a:solidFill>
+              </a:rPr>
+              <a:t>2</a:t>
+            </a:r>
+          </a:p>
+          <a:p>
+            <a:pPr algn="ctr"/>
+            <a:r>
+              <a:rPr lang="en-US" sz="1100" dirty="0">
+                <a:solidFill>
+                  <a:srgbClr val="475569"/>
+                </a:solidFill>
+              </a:rPr>
+              <a:t>Attention items</a:t>
+            </a:r>
+          </a:p>
+        </p:txBody>
+      </p:sp>
+      <p:sp>
+        <p:nvSpPr>
           <p:cNvPr id="2" name="t0"/>
           <p:cNvSpPr txBox="1"/>
           <p:nvPr/>
         </p:nvSpPr>
         <p:spPr>
           <a:xfrm>
-            <a:off x="457200" y="800000"/>
+            <a:off x="457200" y="2900000"/>
             <a:ext cx="8229600" cy="457200"/>
           </a:xfrm>
           <a:prstGeom prst="rect">
@@ -666,7 +1508,7 @@
                   <a:srgbClr val="0F172A"/>
                 </a:solidFill>
               </a:rPr>
-              <a:t>Exceptions</a:t>
+              <a:t>Major gaps</a:t>
             </a:r>
           </a:p>
         </p:txBody>
@@ -679,24 +1521,24 @@
         </p:nvSpPr>
         <p:spPr>
           <a:xfrm>
-            <a:off x="457200" y="1280000"/>
-            <a:ext cx="8229600" cy="457200"/>
-          </a:xfrm>
-          <a:prstGeom prst="rect">
-            <a:avLst/>
-          </a:prstGeom>
-        </p:spPr>
-        <p:txBody>
-          <a:bodyPr/>
-          <a:lstStyle/>
-          <a:p>
-            <a:r>
-              <a:rPr lang="en-US" sz="1600" b="0" dirty="0">
-                <a:solidFill>
-                  <a:srgbClr val="1E293B"/>
-                </a:solidFill>
-              </a:rPr>
-              <a:t>• EXC-00002 Temporary remote-admin path for hosted walkthrough — Approved</a:t>
+            <a:off x="457200" y="3320000"/>
+            <a:ext cx="8229600" cy="457200"/>
+          </a:xfrm>
+          <a:prstGeom prst="rect">
+            <a:avLst/>
+          </a:prstGeom>
+        </p:spPr>
+        <p:txBody>
+          <a:bodyPr/>
+          <a:lstStyle/>
+          <a:p>
+            <a:r>
+              <a:rPr lang="en-US" sz="1600" b="0" dirty="0">
+                <a:solidFill>
+                  <a:srgbClr val="1E293B"/>
+                </a:solidFill>
+              </a:rPr>
+              <a:t>• GAP-00004 A.15 has no current CLEAN evidence</a:t>
             </a:r>
           </a:p>
         </p:txBody>
@@ -709,24 +1551,84 @@
         </p:nvSpPr>
         <p:spPr>
           <a:xfrm>
-            <a:off x="457200" y="1760000"/>
-            <a:ext cx="8229600" cy="457200"/>
-          </a:xfrm>
-          <a:prstGeom prst="rect">
-            <a:avLst/>
-          </a:prstGeom>
-        </p:spPr>
-        <p:txBody>
-          <a:bodyPr/>
-          <a:lstStyle/>
-          <a:p>
-            <a:r>
-              <a:rPr lang="en-US" sz="1600" b="0" dirty="0">
-                <a:solidFill>
-                  <a:srgbClr val="1E293B"/>
-                </a:solidFill>
-              </a:rPr>
-              <a:t>• EXC-00001 Temporary remote-admin path for hosted walkthrough — Approved</a:t>
+            <a:off x="457200" y="3740000"/>
+            <a:ext cx="8229600" cy="457200"/>
+          </a:xfrm>
+          <a:prstGeom prst="rect">
+            <a:avLst/>
+          </a:prstGeom>
+        </p:spPr>
+        <p:txBody>
+          <a:bodyPr/>
+          <a:lstStyle/>
+          <a:p>
+            <a:r>
+              <a:rPr lang="en-US" sz="1600" b="0" dirty="0">
+                <a:solidFill>
+                  <a:srgbClr val="1E293B"/>
+                </a:solidFill>
+              </a:rPr>
+              <a:t>• GAP-00003 A.15 is mapped to controls that are not implemented</a:t>
+            </a:r>
+          </a:p>
+        </p:txBody>
+      </p:sp>
+      <p:sp>
+        <p:nvSpPr>
+          <p:cNvPr id="5" name="t3"/>
+          <p:cNvSpPr txBox="1"/>
+          <p:nvPr/>
+        </p:nvSpPr>
+        <p:spPr>
+          <a:xfrm>
+            <a:off x="457200" y="4160000"/>
+            <a:ext cx="8229600" cy="457200"/>
+          </a:xfrm>
+          <a:prstGeom prst="rect">
+            <a:avLst/>
+          </a:prstGeom>
+        </p:spPr>
+        <p:txBody>
+          <a:bodyPr/>
+          <a:lstStyle/>
+          <a:p>
+            <a:r>
+              <a:rPr lang="en-US" sz="1600" b="0" dirty="0">
+                <a:solidFill>
+                  <a:srgbClr val="1E293B"/>
+                </a:solidFill>
+              </a:rPr>
+              <a:t>• GAP-00002 500.07 has no current CLEAN evidence</a:t>
+            </a:r>
+          </a:p>
+        </p:txBody>
+      </p:sp>
+      <p:sp>
+        <p:nvSpPr>
+          <p:cNvPr id="6" name="t4"/>
+          <p:cNvSpPr txBox="1"/>
+          <p:nvPr/>
+        </p:nvSpPr>
+        <p:spPr>
+          <a:xfrm>
+            <a:off x="457200" y="4580000"/>
+            <a:ext cx="8229600" cy="457200"/>
+          </a:xfrm>
+          <a:prstGeom prst="rect">
+            <a:avLst/>
+          </a:prstGeom>
+        </p:spPr>
+        <p:txBody>
+          <a:bodyPr/>
+          <a:lstStyle/>
+          <a:p>
+            <a:r>
+              <a:rPr lang="en-US" sz="1600" b="0" dirty="0">
+                <a:solidFill>
+                  <a:srgbClr val="1E293B"/>
+                </a:solidFill>
+              </a:rPr>
+              <a:t>• GAP-00001 500.07 is mapped to controls that are not implemented</a:t>
             </a:r>
           </a:p>
         </p:txBody>
@@ -781,7 +1683,7 @@
                   <a:srgbClr val="0F172A"/>
                 </a:solidFill>
               </a:rPr>
-              <a:t>Key attention items</a:t>
+              <a:t>Exceptions</a:t>
             </a:r>
           </a:p>
         </p:txBody>
@@ -794,24 +1696,344 @@
         </p:nvSpPr>
         <p:spPr>
           <a:xfrm>
-            <a:off x="457200" y="1280000"/>
-            <a:ext cx="8229600" cy="457200"/>
-          </a:xfrm>
-          <a:prstGeom prst="rect">
-            <a:avLst/>
-          </a:prstGeom>
-        </p:spPr>
-        <p:txBody>
-          <a:bodyPr/>
-          <a:lstStyle/>
-          <a:p>
-            <a:r>
-              <a:rPr lang="en-US" sz="1600" b="0" dirty="0">
-                <a:solidFill>
-                  <a:srgbClr val="1E293B"/>
-                </a:solidFill>
-              </a:rPr>
-              <a:t>• No attention items from live records.</a:t>
+            <a:off x="457200" y="1220000"/>
+            <a:ext cx="8229600" cy="457200"/>
+          </a:xfrm>
+          <a:prstGeom prst="rect">
+            <a:avLst/>
+          </a:prstGeom>
+        </p:spPr>
+        <p:txBody>
+          <a:bodyPr/>
+          <a:lstStyle/>
+          <a:p>
+            <a:r>
+              <a:rPr lang="en-US" sz="1600" b="0" dirty="0">
+                <a:solidFill>
+                  <a:srgbClr val="1E293B"/>
+                </a:solidFill>
+              </a:rPr>
+              <a:t>• EXC-00003 Temporary remote-admin path for hosted walkthrough — Approved</a:t>
+            </a:r>
+          </a:p>
+        </p:txBody>
+      </p:sp>
+      <p:sp>
+        <p:nvSpPr>
+          <p:cNvPr id="4" name="t2"/>
+          <p:cNvSpPr txBox="1"/>
+          <p:nvPr/>
+        </p:nvSpPr>
+        <p:spPr>
+          <a:xfrm>
+            <a:off x="457200" y="1640000"/>
+            <a:ext cx="8229600" cy="457200"/>
+          </a:xfrm>
+          <a:prstGeom prst="rect">
+            <a:avLst/>
+          </a:prstGeom>
+        </p:spPr>
+        <p:txBody>
+          <a:bodyPr/>
+          <a:lstStyle/>
+          <a:p>
+            <a:r>
+              <a:rPr lang="en-US" sz="1600" b="0" dirty="0">
+                <a:solidFill>
+                  <a:srgbClr val="1E293B"/>
+                </a:solidFill>
+              </a:rPr>
+              <a:t>• EXC-00002 Temporary remote-admin path for hosted walkthrough — Approved</a:t>
+            </a:r>
+          </a:p>
+        </p:txBody>
+      </p:sp>
+      <p:sp>
+        <p:nvSpPr>
+          <p:cNvPr id="5" name="t3"/>
+          <p:cNvSpPr txBox="1"/>
+          <p:nvPr/>
+        </p:nvSpPr>
+        <p:spPr>
+          <a:xfrm>
+            <a:off x="457200" y="2060000"/>
+            <a:ext cx="8229600" cy="457200"/>
+          </a:xfrm>
+          <a:prstGeom prst="rect">
+            <a:avLst/>
+          </a:prstGeom>
+        </p:spPr>
+        <p:txBody>
+          <a:bodyPr/>
+          <a:lstStyle/>
+          <a:p>
+            <a:r>
+              <a:rPr lang="en-US" sz="1600" b="0" dirty="0">
+                <a:solidFill>
+                  <a:srgbClr val="1E293B"/>
+                </a:solidFill>
+              </a:rPr>
+              <a:t>• EXC-00001 Temporary remote-admin path for hosted walkthrough — Approved</a:t>
+            </a:r>
+          </a:p>
+        </p:txBody>
+      </p:sp>
+    </p:spTree>
+  </p:cSld>
+  <p:clrMapOvr>
+    <a:masterClrMapping/>
+  </p:clrMapOvr>
+</p:sld>
+</file>
+
+<file path=ppt/slides/slide7.xml><?xml version="1.0" encoding="utf-8"?>
+<p:sld xmlns:a="http://schemas.openxmlformats.org/drawingml/2006/main" xmlns:r="http://schemas.openxmlformats.org/officeDocument/2006/relationships" xmlns:p="http://schemas.openxmlformats.org/presentationml/2006/main">
+  <p:cSld>
+    <p:spTree>
+      <p:nvGrpSpPr>
+        <p:cNvPr id="1" name=""/>
+        <p:cNvGrpSpPr/>
+        <p:nvPr/>
+      </p:nvGrpSpPr>
+      <p:grpSpPr>
+        <a:xfrm>
+          <a:off x="0" y="0"/>
+          <a:ext cx="0" cy="0"/>
+          <a:chOff x="0" y="0"/>
+          <a:chExt cx="0" cy="0"/>
+        </a:xfrm>
+      </p:grpSpPr>
+      <p:sp>
+        <p:nvSpPr>
+          <p:cNvPr id="2" name="t0"/>
+          <p:cNvSpPr txBox="1"/>
+          <p:nvPr/>
+        </p:nvSpPr>
+        <p:spPr>
+          <a:xfrm>
+            <a:off x="457200" y="800000"/>
+            <a:ext cx="8229600" cy="457200"/>
+          </a:xfrm>
+          <a:prstGeom prst="rect">
+            <a:avLst/>
+          </a:prstGeom>
+        </p:spPr>
+        <p:txBody>
+          <a:bodyPr/>
+          <a:lstStyle/>
+          <a:p>
+            <a:r>
+              <a:rPr lang="en-US" sz="2800" b="1" dirty="0">
+                <a:solidFill>
+                  <a:srgbClr val="0F172A"/>
+                </a:solidFill>
+              </a:rPr>
+              <a:t>Needs attention</a:t>
+            </a:r>
+          </a:p>
+        </p:txBody>
+      </p:sp>
+      <p:sp>
+        <p:nvSpPr>
+          <p:cNvPr id="3" name="t1"/>
+          <p:cNvSpPr txBox="1"/>
+          <p:nvPr/>
+        </p:nvSpPr>
+        <p:spPr>
+          <a:xfrm>
+            <a:off x="457200" y="1220000"/>
+            <a:ext cx="8229600" cy="457200"/>
+          </a:xfrm>
+          <a:prstGeom prst="rect">
+            <a:avLst/>
+          </a:prstGeom>
+        </p:spPr>
+        <p:txBody>
+          <a:bodyPr/>
+          <a:lstStyle/>
+          <a:p>
+            <a:r>
+              <a:rPr lang="en-US" sz="1600" b="0" dirty="0">
+                <a:solidFill>
+                  <a:srgbClr val="1E293B"/>
+                </a:solidFill>
+              </a:rPr>
+              <a:t>• Overdue attestations: Hosted Q4 control attestation passed its due date without closing.</a:t>
+            </a:r>
+          </a:p>
+        </p:txBody>
+      </p:sp>
+      <p:sp>
+        <p:nvSpPr>
+          <p:cNvPr id="4" name="t2"/>
+          <p:cNvSpPr txBox="1"/>
+          <p:nvPr/>
+        </p:nvSpPr>
+        <p:spPr>
+          <a:xfrm>
+            <a:off x="457200" y="1640000"/>
+            <a:ext cx="8229600" cy="457200"/>
+          </a:xfrm>
+          <a:prstGeom prst="rect">
+            <a:avLst/>
+          </a:prstGeom>
+        </p:spPr>
+        <p:txBody>
+          <a:bodyPr/>
+          <a:lstStyle/>
+          <a:p>
+            <a:r>
+              <a:rPr lang="en-US" sz="1600" b="0" dirty="0">
+                <a:solidFill>
+                  <a:srgbClr val="1E293B"/>
+                </a:solidFill>
+              </a:rPr>
+              <a:t>• Overdue attestations: An assigned attestor has not closed this campaign before the due date.</a:t>
+            </a:r>
+          </a:p>
+        </p:txBody>
+      </p:sp>
+    </p:spTree>
+  </p:cSld>
+  <p:clrMapOvr>
+    <a:masterClrMapping/>
+  </p:clrMapOvr>
+</p:sld>
+</file>
+
+<file path=ppt/slides/slide8.xml><?xml version="1.0" encoding="utf-8"?>
+<p:sld xmlns:a="http://schemas.openxmlformats.org/drawingml/2006/main" xmlns:r="http://schemas.openxmlformats.org/officeDocument/2006/relationships" xmlns:p="http://schemas.openxmlformats.org/presentationml/2006/main">
+  <p:cSld>
+    <p:spTree>
+      <p:nvGrpSpPr>
+        <p:cNvPr id="1" name=""/>
+        <p:cNvGrpSpPr/>
+        <p:nvPr/>
+      </p:nvGrpSpPr>
+      <p:grpSpPr>
+        <a:xfrm>
+          <a:off x="0" y="0"/>
+          <a:ext cx="0" cy="0"/>
+          <a:chOff x="0" y="0"/>
+          <a:chExt cx="0" cy="0"/>
+        </a:xfrm>
+      </p:grpSpPr>
+      <p:sp>
+        <p:nvSpPr>
+          <p:cNvPr id="2" name="t0"/>
+          <p:cNvSpPr txBox="1"/>
+          <p:nvPr/>
+        </p:nvSpPr>
+        <p:spPr>
+          <a:xfrm>
+            <a:off x="457200" y="800000"/>
+            <a:ext cx="8229600" cy="457200"/>
+          </a:xfrm>
+          <a:prstGeom prst="rect">
+            <a:avLst/>
+          </a:prstGeom>
+        </p:spPr>
+        <p:txBody>
+          <a:bodyPr/>
+          <a:lstStyle/>
+          <a:p>
+            <a:r>
+              <a:rPr lang="en-US" sz="2800" b="1" dirty="0">
+                <a:solidFill>
+                  <a:srgbClr val="0F172A"/>
+                </a:solidFill>
+              </a:rPr>
+              <a:t>Decisions / next actions</a:t>
+            </a:r>
+          </a:p>
+        </p:txBody>
+      </p:sp>
+      <p:sp>
+        <p:nvSpPr>
+          <p:cNvPr id="3" name="t1"/>
+          <p:cNvSpPr txBox="1"/>
+          <p:nvPr/>
+        </p:nvSpPr>
+        <p:spPr>
+          <a:xfrm>
+            <a:off x="457200" y="1220000"/>
+            <a:ext cx="8229600" cy="457200"/>
+          </a:xfrm>
+          <a:prstGeom prst="rect">
+            <a:avLst/>
+          </a:prstGeom>
+        </p:spPr>
+        <p:txBody>
+          <a:bodyPr/>
+          <a:lstStyle/>
+          <a:p>
+            <a:r>
+              <a:rPr lang="en-US" sz="1600" b="0" dirty="0">
+                <a:solidFill>
+                  <a:srgbClr val="1E293B"/>
+                </a:solidFill>
+              </a:rPr>
+              <a:t>• Review CAM-00003 — Overdue attestations</a:t>
+            </a:r>
+          </a:p>
+        </p:txBody>
+      </p:sp>
+      <p:sp>
+        <p:nvSpPr>
+          <p:cNvPr id="4" name="t2"/>
+          <p:cNvSpPr txBox="1"/>
+          <p:nvPr/>
+        </p:nvSpPr>
+        <p:spPr>
+          <a:xfrm>
+            <a:off x="457200" y="1640000"/>
+            <a:ext cx="8229600" cy="457200"/>
+          </a:xfrm>
+          <a:prstGeom prst="rect">
+            <a:avLst/>
+          </a:prstGeom>
+        </p:spPr>
+        <p:txBody>
+          <a:bodyPr/>
+          <a:lstStyle/>
+          <a:p>
+            <a:r>
+              <a:rPr lang="en-US" sz="1600" b="0" dirty="0">
+                <a:solidFill>
+                  <a:srgbClr val="1E293B"/>
+                </a:solidFill>
+              </a:rPr>
+              <a:t>• Review CAM-00003 — Overdue attestations</a:t>
+            </a:r>
+          </a:p>
+        </p:txBody>
+      </p:sp>
+      <p:sp>
+        <p:nvSpPr>
+          <p:cNvPr id="5" name="t3"/>
+          <p:cNvSpPr txBox="1"/>
+          <p:nvPr/>
+        </p:nvSpPr>
+        <p:spPr>
+          <a:xfrm>
+            <a:off x="457200" y="2060000"/>
+            <a:ext cx="8229600" cy="457200"/>
+          </a:xfrm>
+          <a:prstGeom prst="rect">
+            <a:avLst/>
+          </a:prstGeom>
+        </p:spPr>
+        <p:txBody>
+          <a:bodyPr/>
+          <a:lstStyle/>
+          <a:p>
+            <a:r>
+              <a:rPr lang="en-US" sz="1600" b="0" dirty="0">
+                <a:solidFill>
+                  <a:srgbClr val="1E293B"/>
+                </a:solidFill>
+              </a:rPr>
+              <a:t>An attestation is not a control test. Residual risk does not change unless Supreme Risk recalculates it.</a:t>
             </a:r>
           </a:p>
         </p:txBody>
